--- a/figure1.pptx
+++ b/figure1.pptx
@@ -259,7 +259,7 @@
           <a:p>
             <a:fld id="{B99F8C3E-267A-5347-9FF5-3C775BC7331A}" type="datetimeFigureOut">
               <a:rPr lang="en-US" smtClean="0"/>
-              <a:t>10/29/2023</a:t>
+              <a:t>10/26/2026</a:t>
             </a:fld>
             <a:endParaRPr lang="en-US"/>
           </a:p>
@@ -457,7 +457,7 @@
           <a:p>
             <a:fld id="{B99F8C3E-267A-5347-9FF5-3C775BC7331A}" type="datetimeFigureOut">
               <a:rPr lang="en-US" smtClean="0"/>
-              <a:t>10/29/2023</a:t>
+              <a:t>10/26/2026</a:t>
             </a:fld>
             <a:endParaRPr lang="en-US"/>
           </a:p>
@@ -665,7 +665,7 @@
           <a:p>
             <a:fld id="{B99F8C3E-267A-5347-9FF5-3C775BC7331A}" type="datetimeFigureOut">
               <a:rPr lang="en-US" smtClean="0"/>
-              <a:t>10/29/2023</a:t>
+              <a:t>10/26/2026</a:t>
             </a:fld>
             <a:endParaRPr lang="en-US"/>
           </a:p>
@@ -863,7 +863,7 @@
           <a:p>
             <a:fld id="{B99F8C3E-267A-5347-9FF5-3C775BC7331A}" type="datetimeFigureOut">
               <a:rPr lang="en-US" smtClean="0"/>
-              <a:t>10/29/2023</a:t>
+              <a:t>10/26/2026</a:t>
             </a:fld>
             <a:endParaRPr lang="en-US"/>
           </a:p>
@@ -1138,7 +1138,7 @@
           <a:p>
             <a:fld id="{B99F8C3E-267A-5347-9FF5-3C775BC7331A}" type="datetimeFigureOut">
               <a:rPr lang="en-US" smtClean="0"/>
-              <a:t>10/29/2023</a:t>
+              <a:t>10/26/2026</a:t>
             </a:fld>
             <a:endParaRPr lang="en-US"/>
           </a:p>
@@ -1403,7 +1403,7 @@
           <a:p>
             <a:fld id="{B99F8C3E-267A-5347-9FF5-3C775BC7331A}" type="datetimeFigureOut">
               <a:rPr lang="en-US" smtClean="0"/>
-              <a:t>10/29/2023</a:t>
+              <a:t>10/26/2026</a:t>
             </a:fld>
             <a:endParaRPr lang="en-US"/>
           </a:p>
@@ -1815,7 +1815,7 @@
           <a:p>
             <a:fld id="{B99F8C3E-267A-5347-9FF5-3C775BC7331A}" type="datetimeFigureOut">
               <a:rPr lang="en-US" smtClean="0"/>
-              <a:t>10/29/2023</a:t>
+              <a:t>10/26/2026</a:t>
             </a:fld>
             <a:endParaRPr lang="en-US"/>
           </a:p>
@@ -1956,7 +1956,7 @@
           <a:p>
             <a:fld id="{B99F8C3E-267A-5347-9FF5-3C775BC7331A}" type="datetimeFigureOut">
               <a:rPr lang="en-US" smtClean="0"/>
-              <a:t>10/29/2023</a:t>
+              <a:t>10/26/2026</a:t>
             </a:fld>
             <a:endParaRPr lang="en-US"/>
           </a:p>
@@ -2069,7 +2069,7 @@
           <a:p>
             <a:fld id="{B99F8C3E-267A-5347-9FF5-3C775BC7331A}" type="datetimeFigureOut">
               <a:rPr lang="en-US" smtClean="0"/>
-              <a:t>10/29/2023</a:t>
+              <a:t>10/26/2026</a:t>
             </a:fld>
             <a:endParaRPr lang="en-US"/>
           </a:p>
@@ -2380,7 +2380,7 @@
           <a:p>
             <a:fld id="{B99F8C3E-267A-5347-9FF5-3C775BC7331A}" type="datetimeFigureOut">
               <a:rPr lang="en-US" smtClean="0"/>
-              <a:t>10/29/2023</a:t>
+              <a:t>10/26/2026</a:t>
             </a:fld>
             <a:endParaRPr lang="en-US"/>
           </a:p>
@@ -2668,7 +2668,7 @@
           <a:p>
             <a:fld id="{B99F8C3E-267A-5347-9FF5-3C775BC7331A}" type="datetimeFigureOut">
               <a:rPr lang="en-US" smtClean="0"/>
-              <a:t>10/29/2023</a:t>
+              <a:t>10/26/2026</a:t>
             </a:fld>
             <a:endParaRPr lang="en-US"/>
           </a:p>
@@ -2909,7 +2909,7 @@
           <a:p>
             <a:fld id="{B99F8C3E-267A-5347-9FF5-3C775BC7331A}" type="datetimeFigureOut">
               <a:rPr lang="en-US" smtClean="0"/>
-              <a:t>10/29/2023</a:t>
+              <a:t>10/26/2026</a:t>
             </a:fld>
             <a:endParaRPr lang="en-US"/>
           </a:p>
@@ -3682,7 +3682,7 @@
         </p:nvSpPr>
         <p:spPr>
           <a:xfrm>
-            <a:off x="4832248" y="1430287"/>
+            <a:off x="4977076" y="1887005"/>
             <a:ext cx="516488" cy="276999"/>
           </a:xfrm>
           <a:prstGeom prst="rect">
@@ -4367,7 +4367,7 @@
         </p:nvSpPr>
         <p:spPr>
           <a:xfrm>
-            <a:off x="1947771" y="969549"/>
+            <a:off x="8874923" y="1405880"/>
             <a:ext cx="1348734" cy="921475"/>
           </a:xfrm>
           <a:prstGeom prst="rect">
@@ -4415,7 +4415,7 @@
         </p:nvSpPr>
         <p:spPr>
           <a:xfrm>
-            <a:off x="2387715" y="972814"/>
+            <a:off x="9477497" y="1409145"/>
             <a:ext cx="407035" cy="276999"/>
           </a:xfrm>
           <a:prstGeom prst="rect">
@@ -4447,13 +4447,12 @@
           </p:cNvPr>
           <p:cNvCxnSpPr>
             <a:cxnSpLocks/>
-            <a:endCxn id="74" idx="3"/>
           </p:cNvCxnSpPr>
           <p:nvPr/>
         </p:nvCxnSpPr>
         <p:spPr>
           <a:xfrm flipH="1">
-            <a:off x="3296505" y="1430287"/>
+            <a:off x="8118783" y="2036168"/>
             <a:ext cx="764342" cy="0"/>
           </a:xfrm>
           <a:prstGeom prst="line">
@@ -4494,8 +4493,8 @@
         </p:nvSpPr>
         <p:spPr>
           <a:xfrm>
-            <a:off x="1212487" y="1265774"/>
-            <a:ext cx="4441226" cy="3306413"/>
+            <a:off x="1212487" y="1605123"/>
+            <a:ext cx="4441226" cy="2967064"/>
           </a:xfrm>
           <a:prstGeom prst="ellipse">
             <a:avLst/>
@@ -4547,8 +4546,8 @@
         </p:nvSpPr>
         <p:spPr>
           <a:xfrm>
-            <a:off x="6477331" y="1871207"/>
-            <a:ext cx="5406344" cy="2083770"/>
+            <a:off x="6477331" y="1824643"/>
+            <a:ext cx="4770727" cy="2130334"/>
           </a:xfrm>
           <a:prstGeom prst="ellipse">
             <a:avLst/>
@@ -5204,14 +5203,13 @@
           </p:cNvPr>
           <p:cNvCxnSpPr>
             <a:cxnSpLocks/>
-            <a:endCxn id="74" idx="1"/>
           </p:cNvCxnSpPr>
           <p:nvPr/>
         </p:nvCxnSpPr>
         <p:spPr>
-          <a:xfrm flipV="1">
-            <a:off x="212454" y="1430287"/>
-            <a:ext cx="1735317" cy="921475"/>
+          <a:xfrm>
+            <a:off x="10223657" y="1707286"/>
+            <a:ext cx="1432682" cy="815656"/>
           </a:xfrm>
           <a:prstGeom prst="line">
             <a:avLst/>
@@ -5253,7 +5251,7 @@
         </p:nvCxnSpPr>
         <p:spPr>
           <a:xfrm>
-            <a:off x="212454" y="2368406"/>
+            <a:off x="11656339" y="2506905"/>
             <a:ext cx="0" cy="2843674"/>
           </a:xfrm>
           <a:prstGeom prst="line">
@@ -5295,9 +5293,9 @@
           <p:nvPr/>
         </p:nvCxnSpPr>
         <p:spPr>
-          <a:xfrm>
-            <a:off x="212454" y="5212080"/>
-            <a:ext cx="5883546" cy="320040"/>
+          <a:xfrm flipH="1">
+            <a:off x="6096000" y="5332699"/>
+            <a:ext cx="5560339" cy="199421"/>
           </a:xfrm>
           <a:prstGeom prst="line">
             <a:avLst/>
@@ -5337,7 +5335,7 @@
         </p:nvSpPr>
         <p:spPr>
           <a:xfrm>
-            <a:off x="1104650" y="1213829"/>
+            <a:off x="10306413" y="1547644"/>
             <a:ext cx="858889" cy="276999"/>
           </a:xfrm>
           <a:prstGeom prst="rect">
@@ -5944,4 +5942,10 @@
     </a:ext>
   </a:extLst>
 </a:theme>
+</file>
+
+<file path=docMetadata/LabelInfo.xml><?xml version="1.0" encoding="utf-8"?>
+<clbl:labelList xmlns:clbl="http://schemas.microsoft.com/office/2020/mipLabelMetadata">
+  <clbl:label id="{14c8150c-bc7e-4d77-82d5-2d0905f0cd74}" enabled="1" method="Standard" siteId="{2638f43e-f77d-4fc7-ab92-7b753b7876fd}" contentBits="0" removed="0"/>
+</clbl:labelList>
 </file>